--- a/Figures/Figure2.pptx
+++ b/Figures/Figure2.pptx
@@ -2,7 +2,7 @@
 <file path=ppt/presentation.xml><?xml version="1.0" encoding="utf-8"?>
 <p:presentation xmlns:a="http://schemas.openxmlformats.org/drawingml/2006/main" xmlns:r="http://schemas.openxmlformats.org/officeDocument/2006/relationships" xmlns:p="http://schemas.openxmlformats.org/presentationml/2006/main" saveSubsetFonts="1" autoCompressPictures="0">
   <p:sldMasterIdLst>
-    <p:sldMasterId id="2147483672" r:id="rId1"/>
+    <p:sldMasterId id="2147483684" r:id="rId1"/>
   </p:sldMasterIdLst>
   <p:notesMasterIdLst>
     <p:notesMasterId r:id="rId3"/>
@@ -10,7 +10,7 @@
   <p:sldIdLst>
     <p:sldId id="256" r:id="rId2"/>
   </p:sldIdLst>
-  <p:sldSz cx="5943600" cy="4206875"/>
+  <p:sldSz cx="5943600" cy="4435475"/>
   <p:notesSz cx="6858000" cy="9144000"/>
   <p:defaultTextStyle>
     <a:defPPr>
@@ -107,6 +107,11 @@
       </a:defRPr>
     </a:lvl9pPr>
   </p:defaultTextStyle>
+  <p:extLst>
+    <p:ext uri="{EFAFB233-063F-42B5-8137-9DF3F51BA10A}">
+      <p15:sldGuideLst xmlns:p15="http://schemas.microsoft.com/office/powerpoint/2012/main"/>
+    </p:ext>
+  </p:extLst>
 </p:presentation>
 </file>
 
@@ -192,7 +197,7 @@
           <a:p>
             <a:fld id="{B090A312-5D3D-2344-8979-34846B9B23F5}" type="datetimeFigureOut">
               <a:rPr lang="en-US" smtClean="0"/>
-              <a:t>8/13/26</a:t>
+              <a:t>9/3/26</a:t>
             </a:fld>
             <a:endParaRPr lang="en-US"/>
           </a:p>
@@ -210,8 +215,8 @@
         </p:nvSpPr>
         <p:spPr>
           <a:xfrm>
-            <a:off x="1249363" y="1143000"/>
-            <a:ext cx="4359275" cy="3086100"/>
+            <a:off x="1362075" y="1143000"/>
+            <a:ext cx="4133850" cy="3086100"/>
           </a:xfrm>
           <a:prstGeom prst="rect">
             <a:avLst/>
@@ -488,8 +493,8 @@
         </p:nvSpPr>
         <p:spPr>
           <a:xfrm>
-            <a:off x="1249363" y="1143000"/>
-            <a:ext cx="4359275" cy="3086100"/>
+            <a:off x="1362075" y="1143000"/>
+            <a:ext cx="4133850" cy="3086100"/>
           </a:xfrm>
         </p:spPr>
       </p:sp>
@@ -577,15 +582,15 @@
         </p:nvSpPr>
         <p:spPr>
           <a:xfrm>
-            <a:off x="445770" y="688486"/>
-            <a:ext cx="5052060" cy="1464616"/>
+            <a:off x="445770" y="725899"/>
+            <a:ext cx="5052060" cy="1544202"/>
           </a:xfrm>
         </p:spPr>
         <p:txBody>
           <a:bodyPr anchor="b"/>
           <a:lstStyle>
             <a:lvl1pPr algn="ctr">
-              <a:defRPr sz="3680"/>
+              <a:defRPr sz="3881"/>
             </a:lvl1pPr>
           </a:lstStyle>
           <a:p>
@@ -609,8 +614,8 @@
         </p:nvSpPr>
         <p:spPr>
           <a:xfrm>
-            <a:off x="742950" y="2209584"/>
-            <a:ext cx="4457700" cy="1015687"/>
+            <a:off x="742950" y="2329652"/>
+            <a:ext cx="4457700" cy="1070879"/>
           </a:xfrm>
         </p:spPr>
         <p:txBody>
@@ -618,39 +623,39 @@
           <a:lstStyle>
             <a:lvl1pPr marL="0" indent="0" algn="ctr">
               <a:buNone/>
-              <a:defRPr sz="1472"/>
+              <a:defRPr sz="1552"/>
             </a:lvl1pPr>
-            <a:lvl2pPr marL="280446" indent="0" algn="ctr">
-              <a:buNone/>
-              <a:defRPr sz="1227"/>
+            <a:lvl2pPr marL="295717" indent="0" algn="ctr">
+              <a:buNone/>
+              <a:defRPr sz="1294"/>
             </a:lvl2pPr>
-            <a:lvl3pPr marL="560893" indent="0" algn="ctr">
-              <a:buNone/>
-              <a:defRPr sz="1104"/>
+            <a:lvl3pPr marL="591434" indent="0" algn="ctr">
+              <a:buNone/>
+              <a:defRPr sz="1164"/>
             </a:lvl3pPr>
-            <a:lvl4pPr marL="841339" indent="0" algn="ctr">
-              <a:buNone/>
-              <a:defRPr sz="981"/>
+            <a:lvl4pPr marL="887151" indent="0" algn="ctr">
+              <a:buNone/>
+              <a:defRPr sz="1035"/>
             </a:lvl4pPr>
-            <a:lvl5pPr marL="1121786" indent="0" algn="ctr">
-              <a:buNone/>
-              <a:defRPr sz="981"/>
+            <a:lvl5pPr marL="1182868" indent="0" algn="ctr">
+              <a:buNone/>
+              <a:defRPr sz="1035"/>
             </a:lvl5pPr>
-            <a:lvl6pPr marL="1402232" indent="0" algn="ctr">
-              <a:buNone/>
-              <a:defRPr sz="981"/>
+            <a:lvl6pPr marL="1478585" indent="0" algn="ctr">
+              <a:buNone/>
+              <a:defRPr sz="1035"/>
             </a:lvl6pPr>
-            <a:lvl7pPr marL="1682679" indent="0" algn="ctr">
-              <a:buNone/>
-              <a:defRPr sz="981"/>
+            <a:lvl7pPr marL="1774302" indent="0" algn="ctr">
+              <a:buNone/>
+              <a:defRPr sz="1035"/>
             </a:lvl7pPr>
-            <a:lvl8pPr marL="1963125" indent="0" algn="ctr">
-              <a:buNone/>
-              <a:defRPr sz="981"/>
+            <a:lvl8pPr marL="2070019" indent="0" algn="ctr">
+              <a:buNone/>
+              <a:defRPr sz="1035"/>
             </a:lvl8pPr>
-            <a:lvl9pPr marL="2243572" indent="0" algn="ctr">
-              <a:buNone/>
-              <a:defRPr sz="981"/>
+            <a:lvl9pPr marL="2365736" indent="0" algn="ctr">
+              <a:buNone/>
+              <a:defRPr sz="1035"/>
             </a:lvl9pPr>
           </a:lstStyle>
           <a:p>
@@ -679,7 +684,7 @@
           <a:p>
             <a:fld id="{167D69C9-81A7-064D-B6D1-2C94FD623D00}" type="datetimeFigureOut">
               <a:rPr lang="en-US" smtClean="0"/>
-              <a:t>8/13/26</a:t>
+              <a:t>9/3/26</a:t>
             </a:fld>
             <a:endParaRPr lang="en-US"/>
           </a:p>
@@ -730,7 +735,7 @@
     </p:spTree>
     <p:extLst>
       <p:ext uri="{BB962C8B-B14F-4D97-AF65-F5344CB8AC3E}">
-        <p14:creationId xmlns:p14="http://schemas.microsoft.com/office/powerpoint/2010/main" val="2586687578"/>
+        <p14:creationId xmlns:p14="http://schemas.microsoft.com/office/powerpoint/2010/main" val="1723121830"/>
       </p:ext>
     </p:extLst>
   </p:cSld>
@@ -849,7 +854,7 @@
           <a:p>
             <a:fld id="{167D69C9-81A7-064D-B6D1-2C94FD623D00}" type="datetimeFigureOut">
               <a:rPr lang="en-US" smtClean="0"/>
-              <a:t>8/13/26</a:t>
+              <a:t>9/3/26</a:t>
             </a:fld>
             <a:endParaRPr lang="en-US"/>
           </a:p>
@@ -900,7 +905,7 @@
     </p:spTree>
     <p:extLst>
       <p:ext uri="{BB962C8B-B14F-4D97-AF65-F5344CB8AC3E}">
-        <p14:creationId xmlns:p14="http://schemas.microsoft.com/office/powerpoint/2010/main" val="2909110550"/>
+        <p14:creationId xmlns:p14="http://schemas.microsoft.com/office/powerpoint/2010/main" val="3803104286"/>
       </p:ext>
     </p:extLst>
   </p:cSld>
@@ -939,8 +944,8 @@
         </p:nvSpPr>
         <p:spPr>
           <a:xfrm>
-            <a:off x="4253389" y="223977"/>
-            <a:ext cx="1281589" cy="3565132"/>
+            <a:off x="4253389" y="236148"/>
+            <a:ext cx="1281589" cy="3758860"/>
           </a:xfrm>
         </p:spPr>
         <p:txBody>
@@ -967,8 +972,8 @@
         </p:nvSpPr>
         <p:spPr>
           <a:xfrm>
-            <a:off x="408623" y="223977"/>
-            <a:ext cx="3770471" cy="3565132"/>
+            <a:off x="408623" y="236148"/>
+            <a:ext cx="3770471" cy="3758860"/>
           </a:xfrm>
         </p:spPr>
         <p:txBody>
@@ -1029,7 +1034,7 @@
           <a:p>
             <a:fld id="{167D69C9-81A7-064D-B6D1-2C94FD623D00}" type="datetimeFigureOut">
               <a:rPr lang="en-US" smtClean="0"/>
-              <a:t>8/13/26</a:t>
+              <a:t>9/3/26</a:t>
             </a:fld>
             <a:endParaRPr lang="en-US"/>
           </a:p>
@@ -1080,7 +1085,7 @@
     </p:spTree>
     <p:extLst>
       <p:ext uri="{BB962C8B-B14F-4D97-AF65-F5344CB8AC3E}">
-        <p14:creationId xmlns:p14="http://schemas.microsoft.com/office/powerpoint/2010/main" val="1132531965"/>
+        <p14:creationId xmlns:p14="http://schemas.microsoft.com/office/powerpoint/2010/main" val="1453582048"/>
       </p:ext>
     </p:extLst>
   </p:cSld>
@@ -1199,7 +1204,7 @@
           <a:p>
             <a:fld id="{167D69C9-81A7-064D-B6D1-2C94FD623D00}" type="datetimeFigureOut">
               <a:rPr lang="en-US" smtClean="0"/>
-              <a:t>8/13/26</a:t>
+              <a:t>9/3/26</a:t>
             </a:fld>
             <a:endParaRPr lang="en-US"/>
           </a:p>
@@ -1250,7 +1255,7 @@
     </p:spTree>
     <p:extLst>
       <p:ext uri="{BB962C8B-B14F-4D97-AF65-F5344CB8AC3E}">
-        <p14:creationId xmlns:p14="http://schemas.microsoft.com/office/powerpoint/2010/main" val="2645240062"/>
+        <p14:creationId xmlns:p14="http://schemas.microsoft.com/office/powerpoint/2010/main" val="3505235799"/>
       </p:ext>
     </p:extLst>
   </p:cSld>
@@ -1289,15 +1294,15 @@
         </p:nvSpPr>
         <p:spPr>
           <a:xfrm>
-            <a:off x="405527" y="1048798"/>
-            <a:ext cx="5126355" cy="1749943"/>
+            <a:off x="405527" y="1105790"/>
+            <a:ext cx="5126355" cy="1845034"/>
           </a:xfrm>
         </p:spPr>
         <p:txBody>
           <a:bodyPr anchor="b"/>
           <a:lstStyle>
             <a:lvl1pPr>
-              <a:defRPr sz="3680"/>
+              <a:defRPr sz="3881"/>
             </a:lvl1pPr>
           </a:lstStyle>
           <a:p>
@@ -1321,8 +1326,8 @@
         </p:nvSpPr>
         <p:spPr>
           <a:xfrm>
-            <a:off x="405527" y="2815296"/>
-            <a:ext cx="5126355" cy="920254"/>
+            <a:off x="405527" y="2968279"/>
+            <a:ext cx="5126355" cy="970260"/>
           </a:xfrm>
         </p:spPr>
         <p:txBody>
@@ -1330,7 +1335,7 @@
           <a:lstStyle>
             <a:lvl1pPr marL="0" indent="0">
               <a:buNone/>
-              <a:defRPr sz="1472">
+              <a:defRPr sz="1552">
                 <a:solidFill>
                   <a:schemeClr val="tx1">
                     <a:tint val="82000"/>
@@ -1338,9 +1343,9 @@
                 </a:solidFill>
               </a:defRPr>
             </a:lvl1pPr>
-            <a:lvl2pPr marL="280446" indent="0">
-              <a:buNone/>
-              <a:defRPr sz="1227">
+            <a:lvl2pPr marL="295717" indent="0">
+              <a:buNone/>
+              <a:defRPr sz="1294">
                 <a:solidFill>
                   <a:schemeClr val="tx1">
                     <a:tint val="82000"/>
@@ -1348,9 +1353,9 @@
                 </a:solidFill>
               </a:defRPr>
             </a:lvl2pPr>
-            <a:lvl3pPr marL="560893" indent="0">
-              <a:buNone/>
-              <a:defRPr sz="1104">
+            <a:lvl3pPr marL="591434" indent="0">
+              <a:buNone/>
+              <a:defRPr sz="1164">
                 <a:solidFill>
                   <a:schemeClr val="tx1">
                     <a:tint val="82000"/>
@@ -1358,9 +1363,9 @@
                 </a:solidFill>
               </a:defRPr>
             </a:lvl3pPr>
-            <a:lvl4pPr marL="841339" indent="0">
-              <a:buNone/>
-              <a:defRPr sz="981">
+            <a:lvl4pPr marL="887151" indent="0">
+              <a:buNone/>
+              <a:defRPr sz="1035">
                 <a:solidFill>
                   <a:schemeClr val="tx1">
                     <a:tint val="82000"/>
@@ -1368,9 +1373,9 @@
                 </a:solidFill>
               </a:defRPr>
             </a:lvl4pPr>
-            <a:lvl5pPr marL="1121786" indent="0">
-              <a:buNone/>
-              <a:defRPr sz="981">
+            <a:lvl5pPr marL="1182868" indent="0">
+              <a:buNone/>
+              <a:defRPr sz="1035">
                 <a:solidFill>
                   <a:schemeClr val="tx1">
                     <a:tint val="82000"/>
@@ -1378,9 +1383,9 @@
                 </a:solidFill>
               </a:defRPr>
             </a:lvl5pPr>
-            <a:lvl6pPr marL="1402232" indent="0">
-              <a:buNone/>
-              <a:defRPr sz="981">
+            <a:lvl6pPr marL="1478585" indent="0">
+              <a:buNone/>
+              <a:defRPr sz="1035">
                 <a:solidFill>
                   <a:schemeClr val="tx1">
                     <a:tint val="82000"/>
@@ -1388,9 +1393,9 @@
                 </a:solidFill>
               </a:defRPr>
             </a:lvl6pPr>
-            <a:lvl7pPr marL="1682679" indent="0">
-              <a:buNone/>
-              <a:defRPr sz="981">
+            <a:lvl7pPr marL="1774302" indent="0">
+              <a:buNone/>
+              <a:defRPr sz="1035">
                 <a:solidFill>
                   <a:schemeClr val="tx1">
                     <a:tint val="82000"/>
@@ -1398,9 +1403,9 @@
                 </a:solidFill>
               </a:defRPr>
             </a:lvl7pPr>
-            <a:lvl8pPr marL="1963125" indent="0">
-              <a:buNone/>
-              <a:defRPr sz="981">
+            <a:lvl8pPr marL="2070019" indent="0">
+              <a:buNone/>
+              <a:defRPr sz="1035">
                 <a:solidFill>
                   <a:schemeClr val="tx1">
                     <a:tint val="82000"/>
@@ -1408,9 +1413,9 @@
                 </a:solidFill>
               </a:defRPr>
             </a:lvl8pPr>
-            <a:lvl9pPr marL="2243572" indent="0">
-              <a:buNone/>
-              <a:defRPr sz="981">
+            <a:lvl9pPr marL="2365736" indent="0">
+              <a:buNone/>
+              <a:defRPr sz="1035">
                 <a:solidFill>
                   <a:schemeClr val="tx1">
                     <a:tint val="82000"/>
@@ -1445,7 +1450,7 @@
           <a:p>
             <a:fld id="{167D69C9-81A7-064D-B6D1-2C94FD623D00}" type="datetimeFigureOut">
               <a:rPr lang="en-US" smtClean="0"/>
-              <a:t>8/13/26</a:t>
+              <a:t>9/3/26</a:t>
             </a:fld>
             <a:endParaRPr lang="en-US"/>
           </a:p>
@@ -1496,7 +1501,7 @@
     </p:spTree>
     <p:extLst>
       <p:ext uri="{BB962C8B-B14F-4D97-AF65-F5344CB8AC3E}">
-        <p14:creationId xmlns:p14="http://schemas.microsoft.com/office/powerpoint/2010/main" val="2827750590"/>
+        <p14:creationId xmlns:p14="http://schemas.microsoft.com/office/powerpoint/2010/main" val="3288842188"/>
       </p:ext>
     </p:extLst>
   </p:cSld>
@@ -1558,8 +1563,8 @@
         </p:nvSpPr>
         <p:spPr>
           <a:xfrm>
-            <a:off x="408623" y="1119885"/>
-            <a:ext cx="2526030" cy="2669224"/>
+            <a:off x="408623" y="1180740"/>
+            <a:ext cx="2526030" cy="2814268"/>
           </a:xfrm>
         </p:spPr>
         <p:txBody>
@@ -1615,8 +1620,8 @@
         </p:nvSpPr>
         <p:spPr>
           <a:xfrm>
-            <a:off x="3008948" y="1119885"/>
-            <a:ext cx="2526030" cy="2669224"/>
+            <a:off x="3008948" y="1180740"/>
+            <a:ext cx="2526030" cy="2814268"/>
           </a:xfrm>
         </p:spPr>
         <p:txBody>
@@ -1677,7 +1682,7 @@
           <a:p>
             <a:fld id="{167D69C9-81A7-064D-B6D1-2C94FD623D00}" type="datetimeFigureOut">
               <a:rPr lang="en-US" smtClean="0"/>
-              <a:t>8/13/26</a:t>
+              <a:t>9/3/26</a:t>
             </a:fld>
             <a:endParaRPr lang="en-US"/>
           </a:p>
@@ -1728,7 +1733,7 @@
     </p:spTree>
     <p:extLst>
       <p:ext uri="{BB962C8B-B14F-4D97-AF65-F5344CB8AC3E}">
-        <p14:creationId xmlns:p14="http://schemas.microsoft.com/office/powerpoint/2010/main" val="1611720510"/>
+        <p14:creationId xmlns:p14="http://schemas.microsoft.com/office/powerpoint/2010/main" val="1583095030"/>
       </p:ext>
     </p:extLst>
   </p:cSld>
@@ -1767,8 +1772,8 @@
         </p:nvSpPr>
         <p:spPr>
           <a:xfrm>
-            <a:off x="409397" y="223978"/>
-            <a:ext cx="5126355" cy="813135"/>
+            <a:off x="409397" y="236149"/>
+            <a:ext cx="5126355" cy="857320"/>
           </a:xfrm>
         </p:spPr>
         <p:txBody>
@@ -1795,8 +1800,8 @@
         </p:nvSpPr>
         <p:spPr>
           <a:xfrm>
-            <a:off x="409397" y="1031269"/>
-            <a:ext cx="2514421" cy="505409"/>
+            <a:off x="409397" y="1087308"/>
+            <a:ext cx="2514421" cy="532873"/>
           </a:xfrm>
         </p:spPr>
         <p:txBody>
@@ -1804,39 +1809,39 @@
           <a:lstStyle>
             <a:lvl1pPr marL="0" indent="0">
               <a:buNone/>
-              <a:defRPr sz="1472" b="1"/>
+              <a:defRPr sz="1552" b="1"/>
             </a:lvl1pPr>
-            <a:lvl2pPr marL="280446" indent="0">
-              <a:buNone/>
-              <a:defRPr sz="1227" b="1"/>
+            <a:lvl2pPr marL="295717" indent="0">
+              <a:buNone/>
+              <a:defRPr sz="1294" b="1"/>
             </a:lvl2pPr>
-            <a:lvl3pPr marL="560893" indent="0">
-              <a:buNone/>
-              <a:defRPr sz="1104" b="1"/>
+            <a:lvl3pPr marL="591434" indent="0">
+              <a:buNone/>
+              <a:defRPr sz="1164" b="1"/>
             </a:lvl3pPr>
-            <a:lvl4pPr marL="841339" indent="0">
-              <a:buNone/>
-              <a:defRPr sz="981" b="1"/>
+            <a:lvl4pPr marL="887151" indent="0">
+              <a:buNone/>
+              <a:defRPr sz="1035" b="1"/>
             </a:lvl4pPr>
-            <a:lvl5pPr marL="1121786" indent="0">
-              <a:buNone/>
-              <a:defRPr sz="981" b="1"/>
+            <a:lvl5pPr marL="1182868" indent="0">
+              <a:buNone/>
+              <a:defRPr sz="1035" b="1"/>
             </a:lvl5pPr>
-            <a:lvl6pPr marL="1402232" indent="0">
-              <a:buNone/>
-              <a:defRPr sz="981" b="1"/>
+            <a:lvl6pPr marL="1478585" indent="0">
+              <a:buNone/>
+              <a:defRPr sz="1035" b="1"/>
             </a:lvl6pPr>
-            <a:lvl7pPr marL="1682679" indent="0">
-              <a:buNone/>
-              <a:defRPr sz="981" b="1"/>
+            <a:lvl7pPr marL="1774302" indent="0">
+              <a:buNone/>
+              <a:defRPr sz="1035" b="1"/>
             </a:lvl7pPr>
-            <a:lvl8pPr marL="1963125" indent="0">
-              <a:buNone/>
-              <a:defRPr sz="981" b="1"/>
+            <a:lvl8pPr marL="2070019" indent="0">
+              <a:buNone/>
+              <a:defRPr sz="1035" b="1"/>
             </a:lvl8pPr>
-            <a:lvl9pPr marL="2243572" indent="0">
-              <a:buNone/>
-              <a:defRPr sz="981" b="1"/>
+            <a:lvl9pPr marL="2365736" indent="0">
+              <a:buNone/>
+              <a:defRPr sz="1035" b="1"/>
             </a:lvl9pPr>
           </a:lstStyle>
           <a:p>
@@ -1860,8 +1865,8 @@
         </p:nvSpPr>
         <p:spPr>
           <a:xfrm>
-            <a:off x="409397" y="1536678"/>
-            <a:ext cx="2514421" cy="2260222"/>
+            <a:off x="409397" y="1620181"/>
+            <a:ext cx="2514421" cy="2383041"/>
           </a:xfrm>
         </p:spPr>
         <p:txBody>
@@ -1917,8 +1922,8 @@
         </p:nvSpPr>
         <p:spPr>
           <a:xfrm>
-            <a:off x="3008948" y="1031269"/>
-            <a:ext cx="2526804" cy="505409"/>
+            <a:off x="3008948" y="1087308"/>
+            <a:ext cx="2526804" cy="532873"/>
           </a:xfrm>
         </p:spPr>
         <p:txBody>
@@ -1926,39 +1931,39 @@
           <a:lstStyle>
             <a:lvl1pPr marL="0" indent="0">
               <a:buNone/>
-              <a:defRPr sz="1472" b="1"/>
+              <a:defRPr sz="1552" b="1"/>
             </a:lvl1pPr>
-            <a:lvl2pPr marL="280446" indent="0">
-              <a:buNone/>
-              <a:defRPr sz="1227" b="1"/>
+            <a:lvl2pPr marL="295717" indent="0">
+              <a:buNone/>
+              <a:defRPr sz="1294" b="1"/>
             </a:lvl2pPr>
-            <a:lvl3pPr marL="560893" indent="0">
-              <a:buNone/>
-              <a:defRPr sz="1104" b="1"/>
+            <a:lvl3pPr marL="591434" indent="0">
+              <a:buNone/>
+              <a:defRPr sz="1164" b="1"/>
             </a:lvl3pPr>
-            <a:lvl4pPr marL="841339" indent="0">
-              <a:buNone/>
-              <a:defRPr sz="981" b="1"/>
+            <a:lvl4pPr marL="887151" indent="0">
+              <a:buNone/>
+              <a:defRPr sz="1035" b="1"/>
             </a:lvl4pPr>
-            <a:lvl5pPr marL="1121786" indent="0">
-              <a:buNone/>
-              <a:defRPr sz="981" b="1"/>
+            <a:lvl5pPr marL="1182868" indent="0">
+              <a:buNone/>
+              <a:defRPr sz="1035" b="1"/>
             </a:lvl5pPr>
-            <a:lvl6pPr marL="1402232" indent="0">
-              <a:buNone/>
-              <a:defRPr sz="981" b="1"/>
+            <a:lvl6pPr marL="1478585" indent="0">
+              <a:buNone/>
+              <a:defRPr sz="1035" b="1"/>
             </a:lvl6pPr>
-            <a:lvl7pPr marL="1682679" indent="0">
-              <a:buNone/>
-              <a:defRPr sz="981" b="1"/>
+            <a:lvl7pPr marL="1774302" indent="0">
+              <a:buNone/>
+              <a:defRPr sz="1035" b="1"/>
             </a:lvl7pPr>
-            <a:lvl8pPr marL="1963125" indent="0">
-              <a:buNone/>
-              <a:defRPr sz="981" b="1"/>
+            <a:lvl8pPr marL="2070019" indent="0">
+              <a:buNone/>
+              <a:defRPr sz="1035" b="1"/>
             </a:lvl8pPr>
-            <a:lvl9pPr marL="2243572" indent="0">
-              <a:buNone/>
-              <a:defRPr sz="981" b="1"/>
+            <a:lvl9pPr marL="2365736" indent="0">
+              <a:buNone/>
+              <a:defRPr sz="1035" b="1"/>
             </a:lvl9pPr>
           </a:lstStyle>
           <a:p>
@@ -1982,8 +1987,8 @@
         </p:nvSpPr>
         <p:spPr>
           <a:xfrm>
-            <a:off x="3008948" y="1536678"/>
-            <a:ext cx="2526804" cy="2260222"/>
+            <a:off x="3008948" y="1620181"/>
+            <a:ext cx="2526804" cy="2383041"/>
           </a:xfrm>
         </p:spPr>
         <p:txBody>
@@ -2044,7 +2049,7 @@
           <a:p>
             <a:fld id="{167D69C9-81A7-064D-B6D1-2C94FD623D00}" type="datetimeFigureOut">
               <a:rPr lang="en-US" smtClean="0"/>
-              <a:t>8/13/26</a:t>
+              <a:t>9/3/26</a:t>
             </a:fld>
             <a:endParaRPr lang="en-US"/>
           </a:p>
@@ -2095,7 +2100,7 @@
     </p:spTree>
     <p:extLst>
       <p:ext uri="{BB962C8B-B14F-4D97-AF65-F5344CB8AC3E}">
-        <p14:creationId xmlns:p14="http://schemas.microsoft.com/office/powerpoint/2010/main" val="493899299"/>
+        <p14:creationId xmlns:p14="http://schemas.microsoft.com/office/powerpoint/2010/main" val="3946689611"/>
       </p:ext>
     </p:extLst>
   </p:cSld>
@@ -2162,7 +2167,7 @@
           <a:p>
             <a:fld id="{167D69C9-81A7-064D-B6D1-2C94FD623D00}" type="datetimeFigureOut">
               <a:rPr lang="en-US" smtClean="0"/>
-              <a:t>8/13/26</a:t>
+              <a:t>9/3/26</a:t>
             </a:fld>
             <a:endParaRPr lang="en-US"/>
           </a:p>
@@ -2213,7 +2218,7 @@
     </p:spTree>
     <p:extLst>
       <p:ext uri="{BB962C8B-B14F-4D97-AF65-F5344CB8AC3E}">
-        <p14:creationId xmlns:p14="http://schemas.microsoft.com/office/powerpoint/2010/main" val="3705507950"/>
+        <p14:creationId xmlns:p14="http://schemas.microsoft.com/office/powerpoint/2010/main" val="3027077875"/>
       </p:ext>
     </p:extLst>
   </p:cSld>
@@ -2257,7 +2262,7 @@
           <a:p>
             <a:fld id="{167D69C9-81A7-064D-B6D1-2C94FD623D00}" type="datetimeFigureOut">
               <a:rPr lang="en-US" smtClean="0"/>
-              <a:t>8/13/26</a:t>
+              <a:t>9/3/26</a:t>
             </a:fld>
             <a:endParaRPr lang="en-US"/>
           </a:p>
@@ -2308,7 +2313,7 @@
     </p:spTree>
     <p:extLst>
       <p:ext uri="{BB962C8B-B14F-4D97-AF65-F5344CB8AC3E}">
-        <p14:creationId xmlns:p14="http://schemas.microsoft.com/office/powerpoint/2010/main" val="2095323548"/>
+        <p14:creationId xmlns:p14="http://schemas.microsoft.com/office/powerpoint/2010/main" val="4013169558"/>
       </p:ext>
     </p:extLst>
   </p:cSld>
@@ -2347,15 +2352,15 @@
         </p:nvSpPr>
         <p:spPr>
           <a:xfrm>
-            <a:off x="409397" y="280458"/>
-            <a:ext cx="1916966" cy="981604"/>
+            <a:off x="409397" y="295698"/>
+            <a:ext cx="1916966" cy="1034944"/>
           </a:xfrm>
         </p:spPr>
         <p:txBody>
           <a:bodyPr anchor="b"/>
           <a:lstStyle>
             <a:lvl1pPr>
-              <a:defRPr sz="1963"/>
+              <a:defRPr sz="2070"/>
             </a:lvl1pPr>
           </a:lstStyle>
           <a:p>
@@ -2379,39 +2384,39 @@
         </p:nvSpPr>
         <p:spPr>
           <a:xfrm>
-            <a:off x="2526804" y="605713"/>
-            <a:ext cx="3008948" cy="2989608"/>
+            <a:off x="2526804" y="638627"/>
+            <a:ext cx="3008948" cy="3152062"/>
           </a:xfrm>
         </p:spPr>
         <p:txBody>
           <a:bodyPr/>
           <a:lstStyle>
             <a:lvl1pPr>
-              <a:defRPr sz="1963"/>
+              <a:defRPr sz="2070"/>
             </a:lvl1pPr>
             <a:lvl2pPr>
-              <a:defRPr sz="1718"/>
+              <a:defRPr sz="1811"/>
             </a:lvl2pPr>
             <a:lvl3pPr>
-              <a:defRPr sz="1472"/>
+              <a:defRPr sz="1552"/>
             </a:lvl3pPr>
             <a:lvl4pPr>
-              <a:defRPr sz="1227"/>
+              <a:defRPr sz="1294"/>
             </a:lvl4pPr>
             <a:lvl5pPr>
-              <a:defRPr sz="1227"/>
+              <a:defRPr sz="1294"/>
             </a:lvl5pPr>
             <a:lvl6pPr>
-              <a:defRPr sz="1227"/>
+              <a:defRPr sz="1294"/>
             </a:lvl6pPr>
             <a:lvl7pPr>
-              <a:defRPr sz="1227"/>
+              <a:defRPr sz="1294"/>
             </a:lvl7pPr>
             <a:lvl8pPr>
-              <a:defRPr sz="1227"/>
+              <a:defRPr sz="1294"/>
             </a:lvl8pPr>
             <a:lvl9pPr>
-              <a:defRPr sz="1227"/>
+              <a:defRPr sz="1294"/>
             </a:lvl9pPr>
           </a:lstStyle>
           <a:p>
@@ -2464,8 +2469,8 @@
         </p:nvSpPr>
         <p:spPr>
           <a:xfrm>
-            <a:off x="409397" y="1262062"/>
-            <a:ext cx="1916966" cy="2338127"/>
+            <a:off x="409397" y="1330642"/>
+            <a:ext cx="1916966" cy="2465180"/>
           </a:xfrm>
         </p:spPr>
         <p:txBody>
@@ -2473,39 +2478,39 @@
           <a:lstStyle>
             <a:lvl1pPr marL="0" indent="0">
               <a:buNone/>
-              <a:defRPr sz="981"/>
+              <a:defRPr sz="1035"/>
             </a:lvl1pPr>
-            <a:lvl2pPr marL="280446" indent="0">
-              <a:buNone/>
-              <a:defRPr sz="859"/>
+            <a:lvl2pPr marL="295717" indent="0">
+              <a:buNone/>
+              <a:defRPr sz="906"/>
             </a:lvl2pPr>
-            <a:lvl3pPr marL="560893" indent="0">
-              <a:buNone/>
-              <a:defRPr sz="736"/>
+            <a:lvl3pPr marL="591434" indent="0">
+              <a:buNone/>
+              <a:defRPr sz="776"/>
             </a:lvl3pPr>
-            <a:lvl4pPr marL="841339" indent="0">
-              <a:buNone/>
-              <a:defRPr sz="613"/>
+            <a:lvl4pPr marL="887151" indent="0">
+              <a:buNone/>
+              <a:defRPr sz="647"/>
             </a:lvl4pPr>
-            <a:lvl5pPr marL="1121786" indent="0">
-              <a:buNone/>
-              <a:defRPr sz="613"/>
+            <a:lvl5pPr marL="1182868" indent="0">
+              <a:buNone/>
+              <a:defRPr sz="647"/>
             </a:lvl5pPr>
-            <a:lvl6pPr marL="1402232" indent="0">
-              <a:buNone/>
-              <a:defRPr sz="613"/>
+            <a:lvl6pPr marL="1478585" indent="0">
+              <a:buNone/>
+              <a:defRPr sz="647"/>
             </a:lvl6pPr>
-            <a:lvl7pPr marL="1682679" indent="0">
-              <a:buNone/>
-              <a:defRPr sz="613"/>
+            <a:lvl7pPr marL="1774302" indent="0">
+              <a:buNone/>
+              <a:defRPr sz="647"/>
             </a:lvl7pPr>
-            <a:lvl8pPr marL="1963125" indent="0">
-              <a:buNone/>
-              <a:defRPr sz="613"/>
+            <a:lvl8pPr marL="2070019" indent="0">
+              <a:buNone/>
+              <a:defRPr sz="647"/>
             </a:lvl8pPr>
-            <a:lvl9pPr marL="2243572" indent="0">
-              <a:buNone/>
-              <a:defRPr sz="613"/>
+            <a:lvl9pPr marL="2365736" indent="0">
+              <a:buNone/>
+              <a:defRPr sz="647"/>
             </a:lvl9pPr>
           </a:lstStyle>
           <a:p>
@@ -2534,7 +2539,7 @@
           <a:p>
             <a:fld id="{167D69C9-81A7-064D-B6D1-2C94FD623D00}" type="datetimeFigureOut">
               <a:rPr lang="en-US" smtClean="0"/>
-              <a:t>8/13/26</a:t>
+              <a:t>9/3/26</a:t>
             </a:fld>
             <a:endParaRPr lang="en-US"/>
           </a:p>
@@ -2585,7 +2590,7 @@
     </p:spTree>
     <p:extLst>
       <p:ext uri="{BB962C8B-B14F-4D97-AF65-F5344CB8AC3E}">
-        <p14:creationId xmlns:p14="http://schemas.microsoft.com/office/powerpoint/2010/main" val="237598248"/>
+        <p14:creationId xmlns:p14="http://schemas.microsoft.com/office/powerpoint/2010/main" val="4089359587"/>
       </p:ext>
     </p:extLst>
   </p:cSld>
@@ -2624,15 +2629,15 @@
         </p:nvSpPr>
         <p:spPr>
           <a:xfrm>
-            <a:off x="409397" y="280458"/>
-            <a:ext cx="1916966" cy="981604"/>
+            <a:off x="409397" y="295698"/>
+            <a:ext cx="1916966" cy="1034944"/>
           </a:xfrm>
         </p:spPr>
         <p:txBody>
           <a:bodyPr anchor="b"/>
           <a:lstStyle>
             <a:lvl1pPr>
-              <a:defRPr sz="1963"/>
+              <a:defRPr sz="2070"/>
             </a:lvl1pPr>
           </a:lstStyle>
           <a:p>
@@ -2656,8 +2661,8 @@
         </p:nvSpPr>
         <p:spPr>
           <a:xfrm>
-            <a:off x="2526804" y="605713"/>
-            <a:ext cx="3008948" cy="2989608"/>
+            <a:off x="2526804" y="638627"/>
+            <a:ext cx="3008948" cy="3152062"/>
           </a:xfrm>
         </p:spPr>
         <p:txBody>
@@ -2665,39 +2670,39 @@
           <a:lstStyle>
             <a:lvl1pPr marL="0" indent="0">
               <a:buNone/>
-              <a:defRPr sz="1963"/>
+              <a:defRPr sz="2070"/>
             </a:lvl1pPr>
-            <a:lvl2pPr marL="280446" indent="0">
-              <a:buNone/>
-              <a:defRPr sz="1718"/>
+            <a:lvl2pPr marL="295717" indent="0">
+              <a:buNone/>
+              <a:defRPr sz="1811"/>
             </a:lvl2pPr>
-            <a:lvl3pPr marL="560893" indent="0">
-              <a:buNone/>
-              <a:defRPr sz="1472"/>
+            <a:lvl3pPr marL="591434" indent="0">
+              <a:buNone/>
+              <a:defRPr sz="1552"/>
             </a:lvl3pPr>
-            <a:lvl4pPr marL="841339" indent="0">
-              <a:buNone/>
-              <a:defRPr sz="1227"/>
+            <a:lvl4pPr marL="887151" indent="0">
+              <a:buNone/>
+              <a:defRPr sz="1294"/>
             </a:lvl4pPr>
-            <a:lvl5pPr marL="1121786" indent="0">
-              <a:buNone/>
-              <a:defRPr sz="1227"/>
+            <a:lvl5pPr marL="1182868" indent="0">
+              <a:buNone/>
+              <a:defRPr sz="1294"/>
             </a:lvl5pPr>
-            <a:lvl6pPr marL="1402232" indent="0">
-              <a:buNone/>
-              <a:defRPr sz="1227"/>
+            <a:lvl6pPr marL="1478585" indent="0">
+              <a:buNone/>
+              <a:defRPr sz="1294"/>
             </a:lvl6pPr>
-            <a:lvl7pPr marL="1682679" indent="0">
-              <a:buNone/>
-              <a:defRPr sz="1227"/>
+            <a:lvl7pPr marL="1774302" indent="0">
+              <a:buNone/>
+              <a:defRPr sz="1294"/>
             </a:lvl7pPr>
-            <a:lvl8pPr marL="1963125" indent="0">
-              <a:buNone/>
-              <a:defRPr sz="1227"/>
+            <a:lvl8pPr marL="2070019" indent="0">
+              <a:buNone/>
+              <a:defRPr sz="1294"/>
             </a:lvl8pPr>
-            <a:lvl9pPr marL="2243572" indent="0">
-              <a:buNone/>
-              <a:defRPr sz="1227"/>
+            <a:lvl9pPr marL="2365736" indent="0">
+              <a:buNone/>
+              <a:defRPr sz="1294"/>
             </a:lvl9pPr>
           </a:lstStyle>
           <a:p>
@@ -2721,8 +2726,8 @@
         </p:nvSpPr>
         <p:spPr>
           <a:xfrm>
-            <a:off x="409397" y="1262062"/>
-            <a:ext cx="1916966" cy="2338127"/>
+            <a:off x="409397" y="1330642"/>
+            <a:ext cx="1916966" cy="2465180"/>
           </a:xfrm>
         </p:spPr>
         <p:txBody>
@@ -2730,39 +2735,39 @@
           <a:lstStyle>
             <a:lvl1pPr marL="0" indent="0">
               <a:buNone/>
-              <a:defRPr sz="981"/>
+              <a:defRPr sz="1035"/>
             </a:lvl1pPr>
-            <a:lvl2pPr marL="280446" indent="0">
-              <a:buNone/>
-              <a:defRPr sz="859"/>
+            <a:lvl2pPr marL="295717" indent="0">
+              <a:buNone/>
+              <a:defRPr sz="906"/>
             </a:lvl2pPr>
-            <a:lvl3pPr marL="560893" indent="0">
-              <a:buNone/>
-              <a:defRPr sz="736"/>
+            <a:lvl3pPr marL="591434" indent="0">
+              <a:buNone/>
+              <a:defRPr sz="776"/>
             </a:lvl3pPr>
-            <a:lvl4pPr marL="841339" indent="0">
-              <a:buNone/>
-              <a:defRPr sz="613"/>
+            <a:lvl4pPr marL="887151" indent="0">
+              <a:buNone/>
+              <a:defRPr sz="647"/>
             </a:lvl4pPr>
-            <a:lvl5pPr marL="1121786" indent="0">
-              <a:buNone/>
-              <a:defRPr sz="613"/>
+            <a:lvl5pPr marL="1182868" indent="0">
+              <a:buNone/>
+              <a:defRPr sz="647"/>
             </a:lvl5pPr>
-            <a:lvl6pPr marL="1402232" indent="0">
-              <a:buNone/>
-              <a:defRPr sz="613"/>
+            <a:lvl6pPr marL="1478585" indent="0">
+              <a:buNone/>
+              <a:defRPr sz="647"/>
             </a:lvl6pPr>
-            <a:lvl7pPr marL="1682679" indent="0">
-              <a:buNone/>
-              <a:defRPr sz="613"/>
+            <a:lvl7pPr marL="1774302" indent="0">
+              <a:buNone/>
+              <a:defRPr sz="647"/>
             </a:lvl7pPr>
-            <a:lvl8pPr marL="1963125" indent="0">
-              <a:buNone/>
-              <a:defRPr sz="613"/>
+            <a:lvl8pPr marL="2070019" indent="0">
+              <a:buNone/>
+              <a:defRPr sz="647"/>
             </a:lvl8pPr>
-            <a:lvl9pPr marL="2243572" indent="0">
-              <a:buNone/>
-              <a:defRPr sz="613"/>
+            <a:lvl9pPr marL="2365736" indent="0">
+              <a:buNone/>
+              <a:defRPr sz="647"/>
             </a:lvl9pPr>
           </a:lstStyle>
           <a:p>
@@ -2791,7 +2796,7 @@
           <a:p>
             <a:fld id="{167D69C9-81A7-064D-B6D1-2C94FD623D00}" type="datetimeFigureOut">
               <a:rPr lang="en-US" smtClean="0"/>
-              <a:t>8/13/26</a:t>
+              <a:t>9/3/26</a:t>
             </a:fld>
             <a:endParaRPr lang="en-US"/>
           </a:p>
@@ -2842,7 +2847,7 @@
     </p:spTree>
     <p:extLst>
       <p:ext uri="{BB962C8B-B14F-4D97-AF65-F5344CB8AC3E}">
-        <p14:creationId xmlns:p14="http://schemas.microsoft.com/office/powerpoint/2010/main" val="83368946"/>
+        <p14:creationId xmlns:p14="http://schemas.microsoft.com/office/powerpoint/2010/main" val="3570062637"/>
       </p:ext>
     </p:extLst>
   </p:cSld>
@@ -2886,8 +2891,8 @@
         </p:nvSpPr>
         <p:spPr>
           <a:xfrm>
-            <a:off x="408623" y="223978"/>
-            <a:ext cx="5126355" cy="813135"/>
+            <a:off x="408623" y="236149"/>
+            <a:ext cx="5126355" cy="857320"/>
           </a:xfrm>
           <a:prstGeom prst="rect">
             <a:avLst/>
@@ -2919,8 +2924,8 @@
         </p:nvSpPr>
         <p:spPr>
           <a:xfrm>
-            <a:off x="408623" y="1119885"/>
-            <a:ext cx="5126355" cy="2669224"/>
+            <a:off x="408623" y="1180740"/>
+            <a:ext cx="5126355" cy="2814268"/>
           </a:xfrm>
           <a:prstGeom prst="rect">
             <a:avLst/>
@@ -2981,8 +2986,8 @@
         </p:nvSpPr>
         <p:spPr>
           <a:xfrm>
-            <a:off x="408622" y="3899151"/>
-            <a:ext cx="1337310" cy="223977"/>
+            <a:off x="408622" y="4111029"/>
+            <a:ext cx="1337310" cy="236148"/>
           </a:xfrm>
           <a:prstGeom prst="rect">
             <a:avLst/>
@@ -2992,7 +2997,7 @@
           <a:bodyPr vert="horz" lIns="91440" tIns="45720" rIns="91440" bIns="45720" rtlCol="0" anchor="ctr"/>
           <a:lstStyle>
             <a:lvl1pPr algn="l">
-              <a:defRPr sz="736">
+              <a:defRPr sz="776">
                 <a:solidFill>
                   <a:schemeClr val="tx1">
                     <a:tint val="82000"/>
@@ -3004,7 +3009,7 @@
           <a:p>
             <a:fld id="{167D69C9-81A7-064D-B6D1-2C94FD623D00}" type="datetimeFigureOut">
               <a:rPr lang="en-US" smtClean="0"/>
-              <a:t>8/13/26</a:t>
+              <a:t>9/3/26</a:t>
             </a:fld>
             <a:endParaRPr lang="en-US"/>
           </a:p>
@@ -3022,8 +3027,8 @@
         </p:nvSpPr>
         <p:spPr>
           <a:xfrm>
-            <a:off x="1968818" y="3899151"/>
-            <a:ext cx="2005965" cy="223977"/>
+            <a:off x="1968818" y="4111029"/>
+            <a:ext cx="2005965" cy="236148"/>
           </a:xfrm>
           <a:prstGeom prst="rect">
             <a:avLst/>
@@ -3033,7 +3038,7 @@
           <a:bodyPr vert="horz" lIns="91440" tIns="45720" rIns="91440" bIns="45720" rtlCol="0" anchor="ctr"/>
           <a:lstStyle>
             <a:lvl1pPr algn="ctr">
-              <a:defRPr sz="736">
+              <a:defRPr sz="776">
                 <a:solidFill>
                   <a:schemeClr val="tx1">
                     <a:tint val="82000"/>
@@ -3059,8 +3064,8 @@
         </p:nvSpPr>
         <p:spPr>
           <a:xfrm>
-            <a:off x="4197668" y="3899151"/>
-            <a:ext cx="1337310" cy="223977"/>
+            <a:off x="4197668" y="4111029"/>
+            <a:ext cx="1337310" cy="236148"/>
           </a:xfrm>
           <a:prstGeom prst="rect">
             <a:avLst/>
@@ -3070,7 +3075,7 @@
           <a:bodyPr vert="horz" lIns="91440" tIns="45720" rIns="91440" bIns="45720" rtlCol="0" anchor="ctr"/>
           <a:lstStyle>
             <a:lvl1pPr algn="r">
-              <a:defRPr sz="736">
+              <a:defRPr sz="776">
                 <a:solidFill>
                   <a:schemeClr val="tx1">
                     <a:tint val="82000"/>
@@ -3091,27 +3096,27 @@
     </p:spTree>
     <p:extLst>
       <p:ext uri="{BB962C8B-B14F-4D97-AF65-F5344CB8AC3E}">
-        <p14:creationId xmlns:p14="http://schemas.microsoft.com/office/powerpoint/2010/main" val="1994913830"/>
+        <p14:creationId xmlns:p14="http://schemas.microsoft.com/office/powerpoint/2010/main" val="4035035283"/>
       </p:ext>
     </p:extLst>
   </p:cSld>
   <p:clrMap bg1="lt1" tx1="dk1" bg2="lt2" tx2="dk2" accent1="accent1" accent2="accent2" accent3="accent3" accent4="accent4" accent5="accent5" accent6="accent6" hlink="hlink" folHlink="folHlink"/>
   <p:sldLayoutIdLst>
-    <p:sldLayoutId id="2147483673" r:id="rId1"/>
-    <p:sldLayoutId id="2147483674" r:id="rId2"/>
-    <p:sldLayoutId id="2147483675" r:id="rId3"/>
-    <p:sldLayoutId id="2147483676" r:id="rId4"/>
-    <p:sldLayoutId id="2147483677" r:id="rId5"/>
-    <p:sldLayoutId id="2147483678" r:id="rId6"/>
-    <p:sldLayoutId id="2147483679" r:id="rId7"/>
-    <p:sldLayoutId id="2147483680" r:id="rId8"/>
-    <p:sldLayoutId id="2147483681" r:id="rId9"/>
-    <p:sldLayoutId id="2147483682" r:id="rId10"/>
-    <p:sldLayoutId id="2147483683" r:id="rId11"/>
+    <p:sldLayoutId id="2147483685" r:id="rId1"/>
+    <p:sldLayoutId id="2147483686" r:id="rId2"/>
+    <p:sldLayoutId id="2147483687" r:id="rId3"/>
+    <p:sldLayoutId id="2147483688" r:id="rId4"/>
+    <p:sldLayoutId id="2147483689" r:id="rId5"/>
+    <p:sldLayoutId id="2147483690" r:id="rId6"/>
+    <p:sldLayoutId id="2147483691" r:id="rId7"/>
+    <p:sldLayoutId id="2147483692" r:id="rId8"/>
+    <p:sldLayoutId id="2147483693" r:id="rId9"/>
+    <p:sldLayoutId id="2147483694" r:id="rId10"/>
+    <p:sldLayoutId id="2147483695" r:id="rId11"/>
   </p:sldLayoutIdLst>
   <p:txStyles>
     <p:titleStyle>
-      <a:lvl1pPr algn="l" defTabSz="560893" rtl="0" eaLnBrk="1" latinLnBrk="0" hangingPunct="1">
+      <a:lvl1pPr algn="l" defTabSz="591434" rtl="0" eaLnBrk="1" latinLnBrk="0" hangingPunct="1">
         <a:lnSpc>
           <a:spcPct val="90000"/>
         </a:lnSpc>
@@ -3119,7 +3124,7 @@
           <a:spcPct val="0"/>
         </a:spcBef>
         <a:buNone/>
-        <a:defRPr sz="2699" kern="1200">
+        <a:defRPr sz="2846" kern="1200">
           <a:solidFill>
             <a:schemeClr val="tx1"/>
           </a:solidFill>
@@ -3130,16 +3135,16 @@
       </a:lvl1pPr>
     </p:titleStyle>
     <p:bodyStyle>
-      <a:lvl1pPr marL="140223" indent="-140223" algn="l" defTabSz="560893" rtl="0" eaLnBrk="1" latinLnBrk="0" hangingPunct="1">
+      <a:lvl1pPr marL="147858" indent="-147858" algn="l" defTabSz="591434" rtl="0" eaLnBrk="1" latinLnBrk="0" hangingPunct="1">
         <a:lnSpc>
           <a:spcPct val="90000"/>
         </a:lnSpc>
         <a:spcBef>
-          <a:spcPts val="613"/>
+          <a:spcPts val="647"/>
         </a:spcBef>
         <a:buFont typeface="Arial" panose="020B0604020202020204" pitchFamily="34" charset="0"/>
         <a:buChar char="•"/>
-        <a:defRPr sz="1718" kern="1200">
+        <a:defRPr sz="1811" kern="1200">
           <a:solidFill>
             <a:schemeClr val="tx1"/>
           </a:solidFill>
@@ -3148,16 +3153,16 @@
           <a:cs typeface="+mn-cs"/>
         </a:defRPr>
       </a:lvl1pPr>
-      <a:lvl2pPr marL="420670" indent="-140223" algn="l" defTabSz="560893" rtl="0" eaLnBrk="1" latinLnBrk="0" hangingPunct="1">
+      <a:lvl2pPr marL="443575" indent="-147858" algn="l" defTabSz="591434" rtl="0" eaLnBrk="1" latinLnBrk="0" hangingPunct="1">
         <a:lnSpc>
           <a:spcPct val="90000"/>
         </a:lnSpc>
         <a:spcBef>
-          <a:spcPts val="307"/>
+          <a:spcPts val="323"/>
         </a:spcBef>
         <a:buFont typeface="Arial" panose="020B0604020202020204" pitchFamily="34" charset="0"/>
         <a:buChar char="•"/>
-        <a:defRPr sz="1472" kern="1200">
+        <a:defRPr sz="1552" kern="1200">
           <a:solidFill>
             <a:schemeClr val="tx1"/>
           </a:solidFill>
@@ -3166,16 +3171,16 @@
           <a:cs typeface="+mn-cs"/>
         </a:defRPr>
       </a:lvl2pPr>
-      <a:lvl3pPr marL="701116" indent="-140223" algn="l" defTabSz="560893" rtl="0" eaLnBrk="1" latinLnBrk="0" hangingPunct="1">
+      <a:lvl3pPr marL="739292" indent="-147858" algn="l" defTabSz="591434" rtl="0" eaLnBrk="1" latinLnBrk="0" hangingPunct="1">
         <a:lnSpc>
           <a:spcPct val="90000"/>
         </a:lnSpc>
         <a:spcBef>
-          <a:spcPts val="307"/>
+          <a:spcPts val="323"/>
         </a:spcBef>
         <a:buFont typeface="Arial" panose="020B0604020202020204" pitchFamily="34" charset="0"/>
         <a:buChar char="•"/>
-        <a:defRPr sz="1227" kern="1200">
+        <a:defRPr sz="1294" kern="1200">
           <a:solidFill>
             <a:schemeClr val="tx1"/>
           </a:solidFill>
@@ -3184,16 +3189,16 @@
           <a:cs typeface="+mn-cs"/>
         </a:defRPr>
       </a:lvl3pPr>
-      <a:lvl4pPr marL="981563" indent="-140223" algn="l" defTabSz="560893" rtl="0" eaLnBrk="1" latinLnBrk="0" hangingPunct="1">
+      <a:lvl4pPr marL="1035009" indent="-147858" algn="l" defTabSz="591434" rtl="0" eaLnBrk="1" latinLnBrk="0" hangingPunct="1">
         <a:lnSpc>
           <a:spcPct val="90000"/>
         </a:lnSpc>
         <a:spcBef>
-          <a:spcPts val="307"/>
+          <a:spcPts val="323"/>
         </a:spcBef>
         <a:buFont typeface="Arial" panose="020B0604020202020204" pitchFamily="34" charset="0"/>
         <a:buChar char="•"/>
-        <a:defRPr sz="1104" kern="1200">
+        <a:defRPr sz="1164" kern="1200">
           <a:solidFill>
             <a:schemeClr val="tx1"/>
           </a:solidFill>
@@ -3202,16 +3207,16 @@
           <a:cs typeface="+mn-cs"/>
         </a:defRPr>
       </a:lvl4pPr>
-      <a:lvl5pPr marL="1262009" indent="-140223" algn="l" defTabSz="560893" rtl="0" eaLnBrk="1" latinLnBrk="0" hangingPunct="1">
+      <a:lvl5pPr marL="1330726" indent="-147858" algn="l" defTabSz="591434" rtl="0" eaLnBrk="1" latinLnBrk="0" hangingPunct="1">
         <a:lnSpc>
           <a:spcPct val="90000"/>
         </a:lnSpc>
         <a:spcBef>
-          <a:spcPts val="307"/>
+          <a:spcPts val="323"/>
         </a:spcBef>
         <a:buFont typeface="Arial" panose="020B0604020202020204" pitchFamily="34" charset="0"/>
         <a:buChar char="•"/>
-        <a:defRPr sz="1104" kern="1200">
+        <a:defRPr sz="1164" kern="1200">
           <a:solidFill>
             <a:schemeClr val="tx1"/>
           </a:solidFill>
@@ -3220,16 +3225,16 @@
           <a:cs typeface="+mn-cs"/>
         </a:defRPr>
       </a:lvl5pPr>
-      <a:lvl6pPr marL="1542456" indent="-140223" algn="l" defTabSz="560893" rtl="0" eaLnBrk="1" latinLnBrk="0" hangingPunct="1">
+      <a:lvl6pPr marL="1626443" indent="-147858" algn="l" defTabSz="591434" rtl="0" eaLnBrk="1" latinLnBrk="0" hangingPunct="1">
         <a:lnSpc>
           <a:spcPct val="90000"/>
         </a:lnSpc>
         <a:spcBef>
-          <a:spcPts val="307"/>
+          <a:spcPts val="323"/>
         </a:spcBef>
         <a:buFont typeface="Arial" panose="020B0604020202020204" pitchFamily="34" charset="0"/>
         <a:buChar char="•"/>
-        <a:defRPr sz="1104" kern="1200">
+        <a:defRPr sz="1164" kern="1200">
           <a:solidFill>
             <a:schemeClr val="tx1"/>
           </a:solidFill>
@@ -3238,16 +3243,16 @@
           <a:cs typeface="+mn-cs"/>
         </a:defRPr>
       </a:lvl6pPr>
-      <a:lvl7pPr marL="1822902" indent="-140223" algn="l" defTabSz="560893" rtl="0" eaLnBrk="1" latinLnBrk="0" hangingPunct="1">
+      <a:lvl7pPr marL="1922160" indent="-147858" algn="l" defTabSz="591434" rtl="0" eaLnBrk="1" latinLnBrk="0" hangingPunct="1">
         <a:lnSpc>
           <a:spcPct val="90000"/>
         </a:lnSpc>
         <a:spcBef>
-          <a:spcPts val="307"/>
+          <a:spcPts val="323"/>
         </a:spcBef>
         <a:buFont typeface="Arial" panose="020B0604020202020204" pitchFamily="34" charset="0"/>
         <a:buChar char="•"/>
-        <a:defRPr sz="1104" kern="1200">
+        <a:defRPr sz="1164" kern="1200">
           <a:solidFill>
             <a:schemeClr val="tx1"/>
           </a:solidFill>
@@ -3256,16 +3261,16 @@
           <a:cs typeface="+mn-cs"/>
         </a:defRPr>
       </a:lvl7pPr>
-      <a:lvl8pPr marL="2103349" indent="-140223" algn="l" defTabSz="560893" rtl="0" eaLnBrk="1" latinLnBrk="0" hangingPunct="1">
+      <a:lvl8pPr marL="2217877" indent="-147858" algn="l" defTabSz="591434" rtl="0" eaLnBrk="1" latinLnBrk="0" hangingPunct="1">
         <a:lnSpc>
           <a:spcPct val="90000"/>
         </a:lnSpc>
         <a:spcBef>
-          <a:spcPts val="307"/>
+          <a:spcPts val="323"/>
         </a:spcBef>
         <a:buFont typeface="Arial" panose="020B0604020202020204" pitchFamily="34" charset="0"/>
         <a:buChar char="•"/>
-        <a:defRPr sz="1104" kern="1200">
+        <a:defRPr sz="1164" kern="1200">
           <a:solidFill>
             <a:schemeClr val="tx1"/>
           </a:solidFill>
@@ -3274,16 +3279,16 @@
           <a:cs typeface="+mn-cs"/>
         </a:defRPr>
       </a:lvl8pPr>
-      <a:lvl9pPr marL="2383795" indent="-140223" algn="l" defTabSz="560893" rtl="0" eaLnBrk="1" latinLnBrk="0" hangingPunct="1">
+      <a:lvl9pPr marL="2513594" indent="-147858" algn="l" defTabSz="591434" rtl="0" eaLnBrk="1" latinLnBrk="0" hangingPunct="1">
         <a:lnSpc>
           <a:spcPct val="90000"/>
         </a:lnSpc>
         <a:spcBef>
-          <a:spcPts val="307"/>
+          <a:spcPts val="323"/>
         </a:spcBef>
         <a:buFont typeface="Arial" panose="020B0604020202020204" pitchFamily="34" charset="0"/>
         <a:buChar char="•"/>
-        <a:defRPr sz="1104" kern="1200">
+        <a:defRPr sz="1164" kern="1200">
           <a:solidFill>
             <a:schemeClr val="tx1"/>
           </a:solidFill>
@@ -3297,8 +3302,8 @@
       <a:defPPr>
         <a:defRPr lang="en-US"/>
       </a:defPPr>
-      <a:lvl1pPr marL="0" algn="l" defTabSz="560893" rtl="0" eaLnBrk="1" latinLnBrk="0" hangingPunct="1">
-        <a:defRPr sz="1104" kern="1200">
+      <a:lvl1pPr marL="0" algn="l" defTabSz="591434" rtl="0" eaLnBrk="1" latinLnBrk="0" hangingPunct="1">
+        <a:defRPr sz="1164" kern="1200">
           <a:solidFill>
             <a:schemeClr val="tx1"/>
           </a:solidFill>
@@ -3307,8 +3312,8 @@
           <a:cs typeface="+mn-cs"/>
         </a:defRPr>
       </a:lvl1pPr>
-      <a:lvl2pPr marL="280446" algn="l" defTabSz="560893" rtl="0" eaLnBrk="1" latinLnBrk="0" hangingPunct="1">
-        <a:defRPr sz="1104" kern="1200">
+      <a:lvl2pPr marL="295717" algn="l" defTabSz="591434" rtl="0" eaLnBrk="1" latinLnBrk="0" hangingPunct="1">
+        <a:defRPr sz="1164" kern="1200">
           <a:solidFill>
             <a:schemeClr val="tx1"/>
           </a:solidFill>
@@ -3317,8 +3322,8 @@
           <a:cs typeface="+mn-cs"/>
         </a:defRPr>
       </a:lvl2pPr>
-      <a:lvl3pPr marL="560893" algn="l" defTabSz="560893" rtl="0" eaLnBrk="1" latinLnBrk="0" hangingPunct="1">
-        <a:defRPr sz="1104" kern="1200">
+      <a:lvl3pPr marL="591434" algn="l" defTabSz="591434" rtl="0" eaLnBrk="1" latinLnBrk="0" hangingPunct="1">
+        <a:defRPr sz="1164" kern="1200">
           <a:solidFill>
             <a:schemeClr val="tx1"/>
           </a:solidFill>
@@ -3327,8 +3332,8 @@
           <a:cs typeface="+mn-cs"/>
         </a:defRPr>
       </a:lvl3pPr>
-      <a:lvl4pPr marL="841339" algn="l" defTabSz="560893" rtl="0" eaLnBrk="1" latinLnBrk="0" hangingPunct="1">
-        <a:defRPr sz="1104" kern="1200">
+      <a:lvl4pPr marL="887151" algn="l" defTabSz="591434" rtl="0" eaLnBrk="1" latinLnBrk="0" hangingPunct="1">
+        <a:defRPr sz="1164" kern="1200">
           <a:solidFill>
             <a:schemeClr val="tx1"/>
           </a:solidFill>
@@ -3337,8 +3342,8 @@
           <a:cs typeface="+mn-cs"/>
         </a:defRPr>
       </a:lvl4pPr>
-      <a:lvl5pPr marL="1121786" algn="l" defTabSz="560893" rtl="0" eaLnBrk="1" latinLnBrk="0" hangingPunct="1">
-        <a:defRPr sz="1104" kern="1200">
+      <a:lvl5pPr marL="1182868" algn="l" defTabSz="591434" rtl="0" eaLnBrk="1" latinLnBrk="0" hangingPunct="1">
+        <a:defRPr sz="1164" kern="1200">
           <a:solidFill>
             <a:schemeClr val="tx1"/>
           </a:solidFill>
@@ -3347,8 +3352,8 @@
           <a:cs typeface="+mn-cs"/>
         </a:defRPr>
       </a:lvl5pPr>
-      <a:lvl6pPr marL="1402232" algn="l" defTabSz="560893" rtl="0" eaLnBrk="1" latinLnBrk="0" hangingPunct="1">
-        <a:defRPr sz="1104" kern="1200">
+      <a:lvl6pPr marL="1478585" algn="l" defTabSz="591434" rtl="0" eaLnBrk="1" latinLnBrk="0" hangingPunct="1">
+        <a:defRPr sz="1164" kern="1200">
           <a:solidFill>
             <a:schemeClr val="tx1"/>
           </a:solidFill>
@@ -3357,8 +3362,8 @@
           <a:cs typeface="+mn-cs"/>
         </a:defRPr>
       </a:lvl6pPr>
-      <a:lvl7pPr marL="1682679" algn="l" defTabSz="560893" rtl="0" eaLnBrk="1" latinLnBrk="0" hangingPunct="1">
-        <a:defRPr sz="1104" kern="1200">
+      <a:lvl7pPr marL="1774302" algn="l" defTabSz="591434" rtl="0" eaLnBrk="1" latinLnBrk="0" hangingPunct="1">
+        <a:defRPr sz="1164" kern="1200">
           <a:solidFill>
             <a:schemeClr val="tx1"/>
           </a:solidFill>
@@ -3367,8 +3372,8 @@
           <a:cs typeface="+mn-cs"/>
         </a:defRPr>
       </a:lvl7pPr>
-      <a:lvl8pPr marL="1963125" algn="l" defTabSz="560893" rtl="0" eaLnBrk="1" latinLnBrk="0" hangingPunct="1">
-        <a:defRPr sz="1104" kern="1200">
+      <a:lvl8pPr marL="2070019" algn="l" defTabSz="591434" rtl="0" eaLnBrk="1" latinLnBrk="0" hangingPunct="1">
+        <a:defRPr sz="1164" kern="1200">
           <a:solidFill>
             <a:schemeClr val="tx1"/>
           </a:solidFill>
@@ -3377,8 +3382,8 @@
           <a:cs typeface="+mn-cs"/>
         </a:defRPr>
       </a:lvl8pPr>
-      <a:lvl9pPr marL="2243572" algn="l" defTabSz="560893" rtl="0" eaLnBrk="1" latinLnBrk="0" hangingPunct="1">
-        <a:defRPr sz="1104" kern="1200">
+      <a:lvl9pPr marL="2365736" algn="l" defTabSz="591434" rtl="0" eaLnBrk="1" latinLnBrk="0" hangingPunct="1">
+        <a:defRPr sz="1164" kern="1200">
           <a:solidFill>
             <a:schemeClr val="tx1"/>
           </a:solidFill>
@@ -3430,8 +3435,68 @@
         </p:blipFill>
         <p:spPr>
           <a:xfrm>
-            <a:off x="4753995" y="-2567"/>
+            <a:off x="4753995" y="211941"/>
             <a:ext cx="1181100" cy="1460500"/>
+          </a:xfrm>
+          <a:prstGeom prst="rect">
+            <a:avLst/>
+          </a:prstGeom>
+        </p:spPr>
+      </p:pic>
+      <p:pic>
+        <p:nvPicPr>
+          <p:cNvPr id="92" name="Picture 91">
+            <a:extLst>
+              <a:ext uri="{FF2B5EF4-FFF2-40B4-BE49-F238E27FC236}">
+                <a16:creationId xmlns:a16="http://schemas.microsoft.com/office/drawing/2014/main" id="{EE95A395-3386-3B86-974D-CB0C6F361EDD}"/>
+              </a:ext>
+            </a:extLst>
+          </p:cNvPr>
+          <p:cNvPicPr>
+            <a:picLocks noChangeAspect="1"/>
+          </p:cNvPicPr>
+          <p:nvPr/>
+        </p:nvPicPr>
+        <p:blipFill>
+          <a:blip r:embed="rId4"/>
+          <a:stretch>
+            <a:fillRect/>
+          </a:stretch>
+        </p:blipFill>
+        <p:spPr>
+          <a:xfrm>
+            <a:off x="4753995" y="1544153"/>
+            <a:ext cx="1181100" cy="1460500"/>
+          </a:xfrm>
+          <a:prstGeom prst="rect">
+            <a:avLst/>
+          </a:prstGeom>
+        </p:spPr>
+      </p:pic>
+      <p:pic>
+        <p:nvPicPr>
+          <p:cNvPr id="82" name="Picture 81">
+            <a:extLst>
+              <a:ext uri="{FF2B5EF4-FFF2-40B4-BE49-F238E27FC236}">
+                <a16:creationId xmlns:a16="http://schemas.microsoft.com/office/drawing/2014/main" id="{5018A438-D4CF-5528-E811-804E117E7D9E}"/>
+              </a:ext>
+            </a:extLst>
+          </p:cNvPr>
+          <p:cNvPicPr>
+            <a:picLocks noChangeAspect="1"/>
+          </p:cNvPicPr>
+          <p:nvPr/>
+        </p:nvPicPr>
+        <p:blipFill>
+          <a:blip r:embed="rId5"/>
+          <a:stretch>
+            <a:fillRect/>
+          </a:stretch>
+        </p:blipFill>
+        <p:spPr>
+          <a:xfrm>
+            <a:off x="4753995" y="2876366"/>
+            <a:ext cx="1181100" cy="1549400"/>
           </a:xfrm>
           <a:prstGeom prst="rect">
             <a:avLst/>
@@ -3453,14 +3518,14 @@
           <p:nvPr/>
         </p:nvPicPr>
         <p:blipFill>
-          <a:blip r:embed="rId4"/>
+          <a:blip r:embed="rId6"/>
           <a:stretch>
             <a:fillRect/>
           </a:stretch>
         </p:blipFill>
         <p:spPr>
           <a:xfrm>
-            <a:off x="8505" y="-2567"/>
+            <a:off x="8505" y="211941"/>
             <a:ext cx="1181100" cy="1460500"/>
           </a:xfrm>
           <a:prstGeom prst="rect">
@@ -3483,14 +3548,14 @@
           <p:nvPr/>
         </p:nvPicPr>
         <p:blipFill>
-          <a:blip r:embed="rId5"/>
+          <a:blip r:embed="rId7"/>
           <a:stretch>
             <a:fillRect/>
           </a:stretch>
         </p:blipFill>
         <p:spPr>
           <a:xfrm>
-            <a:off x="1195388" y="-2567"/>
+            <a:off x="1195388" y="211941"/>
             <a:ext cx="1181100" cy="1460500"/>
           </a:xfrm>
           <a:prstGeom prst="rect">
@@ -3513,14 +3578,14 @@
           <p:nvPr/>
         </p:nvPicPr>
         <p:blipFill>
-          <a:blip r:embed="rId6"/>
+          <a:blip r:embed="rId8"/>
           <a:stretch>
             <a:fillRect/>
           </a:stretch>
         </p:blipFill>
         <p:spPr>
           <a:xfrm>
-            <a:off x="3547352" y="-2567"/>
+            <a:off x="3547352" y="211941"/>
             <a:ext cx="1181100" cy="1460500"/>
           </a:xfrm>
           <a:prstGeom prst="rect">
@@ -3543,14 +3608,14 @@
           <p:nvPr/>
         </p:nvPicPr>
         <p:blipFill>
-          <a:blip r:embed="rId7"/>
+          <a:blip r:embed="rId9"/>
           <a:stretch>
             <a:fillRect/>
           </a:stretch>
         </p:blipFill>
         <p:spPr>
           <a:xfrm>
-            <a:off x="2374343" y="-2567"/>
+            <a:off x="2374343" y="211941"/>
             <a:ext cx="1181100" cy="1460500"/>
           </a:xfrm>
           <a:prstGeom prst="rect">
@@ -3572,7 +3637,7 @@
         </p:nvSpPr>
         <p:spPr>
           <a:xfrm>
-            <a:off x="786777" y="983490"/>
+            <a:off x="786777" y="1197998"/>
             <a:ext cx="369012" cy="184666"/>
           </a:xfrm>
           <a:prstGeom prst="rect">
@@ -3610,7 +3675,7 @@
         </p:nvSpPr>
         <p:spPr>
           <a:xfrm>
-            <a:off x="2009014" y="880956"/>
+            <a:off x="2009014" y="1095464"/>
             <a:ext cx="325730" cy="184666"/>
           </a:xfrm>
           <a:prstGeom prst="rect">
@@ -3648,7 +3713,7 @@
         </p:nvSpPr>
         <p:spPr>
           <a:xfrm>
-            <a:off x="3229713" y="973289"/>
+            <a:off x="3229713" y="1187797"/>
             <a:ext cx="325730" cy="184666"/>
           </a:xfrm>
           <a:prstGeom prst="rect">
@@ -3686,7 +3751,7 @@
         </p:nvSpPr>
         <p:spPr>
           <a:xfrm>
-            <a:off x="4363123" y="973289"/>
+            <a:off x="4363123" y="1187797"/>
             <a:ext cx="325730" cy="184666"/>
           </a:xfrm>
           <a:prstGeom prst="rect">
@@ -3725,14 +3790,14 @@
           <p:nvPr/>
         </p:nvPicPr>
         <p:blipFill>
-          <a:blip r:embed="rId8"/>
+          <a:blip r:embed="rId10"/>
           <a:stretch>
             <a:fillRect/>
           </a:stretch>
         </p:blipFill>
         <p:spPr>
           <a:xfrm>
-            <a:off x="2374343" y="1329645"/>
+            <a:off x="2374343" y="1544153"/>
             <a:ext cx="1181100" cy="1460500"/>
           </a:xfrm>
           <a:prstGeom prst="rect">
@@ -3755,14 +3820,14 @@
           <p:nvPr/>
         </p:nvPicPr>
         <p:blipFill>
-          <a:blip r:embed="rId9"/>
+          <a:blip r:embed="rId11"/>
           <a:stretch>
             <a:fillRect/>
           </a:stretch>
         </p:blipFill>
         <p:spPr>
           <a:xfrm>
-            <a:off x="3547352" y="1329645"/>
+            <a:off x="3547352" y="1544153"/>
             <a:ext cx="1181100" cy="1460500"/>
           </a:xfrm>
           <a:prstGeom prst="rect">
@@ -3785,14 +3850,14 @@
           <p:nvPr/>
         </p:nvPicPr>
         <p:blipFill>
-          <a:blip r:embed="rId10"/>
+          <a:blip r:embed="rId12"/>
           <a:stretch>
             <a:fillRect/>
           </a:stretch>
         </p:blipFill>
         <p:spPr>
           <a:xfrm>
-            <a:off x="1195388" y="1329645"/>
+            <a:off x="1195388" y="1544153"/>
             <a:ext cx="1181100" cy="1460500"/>
           </a:xfrm>
           <a:prstGeom prst="rect">
@@ -3815,14 +3880,14 @@
           <p:nvPr/>
         </p:nvPicPr>
         <p:blipFill>
-          <a:blip r:embed="rId11"/>
+          <a:blip r:embed="rId13"/>
           <a:stretch>
             <a:fillRect/>
           </a:stretch>
         </p:blipFill>
         <p:spPr>
           <a:xfrm>
-            <a:off x="8505" y="1329645"/>
+            <a:off x="8505" y="1544153"/>
             <a:ext cx="1181100" cy="1460500"/>
           </a:xfrm>
           <a:prstGeom prst="rect">
@@ -3844,7 +3909,7 @@
         </p:nvSpPr>
         <p:spPr>
           <a:xfrm>
-            <a:off x="862284" y="2315703"/>
+            <a:off x="862284" y="2530211"/>
             <a:ext cx="325730" cy="184666"/>
           </a:xfrm>
           <a:prstGeom prst="rect">
@@ -3882,7 +3947,7 @@
         </p:nvSpPr>
         <p:spPr>
           <a:xfrm>
-            <a:off x="2006922" y="2315703"/>
+            <a:off x="2006922" y="2530211"/>
             <a:ext cx="325730" cy="184666"/>
           </a:xfrm>
           <a:prstGeom prst="rect">
@@ -3920,7 +3985,7 @@
         </p:nvSpPr>
         <p:spPr>
           <a:xfrm>
-            <a:off x="3193805" y="2315703"/>
+            <a:off x="3193805" y="2530211"/>
             <a:ext cx="369012" cy="184666"/>
           </a:xfrm>
           <a:prstGeom prst="rect">
@@ -3958,7 +4023,7 @@
         </p:nvSpPr>
         <p:spPr>
           <a:xfrm>
-            <a:off x="4319841" y="2315703"/>
+            <a:off x="4319841" y="2530211"/>
             <a:ext cx="369012" cy="184666"/>
           </a:xfrm>
           <a:prstGeom prst="rect">
@@ -3997,13 +4062,13 @@
           <p:nvPr/>
         </p:nvPicPr>
         <p:blipFill>
-          <a:blip r:embed="rId12"/>
+          <a:blip r:embed="rId14"/>
           <a:srcRect/>
           <a:stretch/>
         </p:blipFill>
         <p:spPr>
           <a:xfrm>
-            <a:off x="8505" y="2661858"/>
+            <a:off x="8505" y="2876366"/>
             <a:ext cx="1181100" cy="1549400"/>
           </a:xfrm>
           <a:prstGeom prst="rect">
@@ -4026,13 +4091,43 @@
           <p:nvPr/>
         </p:nvPicPr>
         <p:blipFill>
-          <a:blip r:embed="rId13"/>
+          <a:blip r:embed="rId15"/>
           <a:srcRect/>
           <a:stretch/>
         </p:blipFill>
         <p:spPr>
           <a:xfrm>
-            <a:off x="1195388" y="2661858"/>
+            <a:off x="1195388" y="2876366"/>
+            <a:ext cx="1181100" cy="1549400"/>
+          </a:xfrm>
+          <a:prstGeom prst="rect">
+            <a:avLst/>
+          </a:prstGeom>
+        </p:spPr>
+      </p:pic>
+      <p:pic>
+        <p:nvPicPr>
+          <p:cNvPr id="69" name="Picture 68">
+            <a:extLst>
+              <a:ext uri="{FF2B5EF4-FFF2-40B4-BE49-F238E27FC236}">
+                <a16:creationId xmlns:a16="http://schemas.microsoft.com/office/drawing/2014/main" id="{6F83A374-6612-4E59-35D1-0E056BDABEB4}"/>
+              </a:ext>
+            </a:extLst>
+          </p:cNvPr>
+          <p:cNvPicPr>
+            <a:picLocks noChangeAspect="1"/>
+          </p:cNvPicPr>
+          <p:nvPr/>
+        </p:nvPicPr>
+        <p:blipFill>
+          <a:blip r:embed="rId16"/>
+          <a:stretch>
+            <a:fillRect/>
+          </a:stretch>
+        </p:blipFill>
+        <p:spPr>
+          <a:xfrm>
+            <a:off x="2374343" y="2876366"/>
             <a:ext cx="1181100" cy="1549400"/>
           </a:xfrm>
           <a:prstGeom prst="rect">
@@ -4055,44 +4150,14 @@
           <p:nvPr/>
         </p:nvPicPr>
         <p:blipFill>
-          <a:blip r:embed="rId14"/>
+          <a:blip r:embed="rId17"/>
           <a:stretch>
             <a:fillRect/>
           </a:stretch>
         </p:blipFill>
         <p:spPr>
           <a:xfrm>
-            <a:off x="3547352" y="2661858"/>
-            <a:ext cx="1181100" cy="1549400"/>
-          </a:xfrm>
-          <a:prstGeom prst="rect">
-            <a:avLst/>
-          </a:prstGeom>
-        </p:spPr>
-      </p:pic>
-      <p:pic>
-        <p:nvPicPr>
-          <p:cNvPr id="69" name="Picture 68">
-            <a:extLst>
-              <a:ext uri="{FF2B5EF4-FFF2-40B4-BE49-F238E27FC236}">
-                <a16:creationId xmlns:a16="http://schemas.microsoft.com/office/drawing/2014/main" id="{6F83A374-6612-4E59-35D1-0E056BDABEB4}"/>
-              </a:ext>
-            </a:extLst>
-          </p:cNvPr>
-          <p:cNvPicPr>
-            <a:picLocks noChangeAspect="1"/>
-          </p:cNvPicPr>
-          <p:nvPr/>
-        </p:nvPicPr>
-        <p:blipFill>
-          <a:blip r:embed="rId15"/>
-          <a:stretch>
-            <a:fillRect/>
-          </a:stretch>
-        </p:blipFill>
-        <p:spPr>
-          <a:xfrm>
-            <a:off x="2374343" y="2661858"/>
+            <a:off x="3547352" y="2876366"/>
             <a:ext cx="1181100" cy="1549400"/>
           </a:xfrm>
           <a:prstGeom prst="rect">
@@ -4114,7 +4179,7 @@
         </p:nvSpPr>
         <p:spPr>
           <a:xfrm>
-            <a:off x="825790" y="3739030"/>
+            <a:off x="825790" y="3953538"/>
             <a:ext cx="325730" cy="184666"/>
           </a:xfrm>
           <a:prstGeom prst="rect">
@@ -4152,7 +4217,7 @@
         </p:nvSpPr>
         <p:spPr>
           <a:xfrm>
-            <a:off x="1961463" y="3739030"/>
+            <a:off x="1961463" y="3953538"/>
             <a:ext cx="369012" cy="184666"/>
           </a:xfrm>
           <a:prstGeom prst="rect">
@@ -4190,7 +4255,7 @@
         </p:nvSpPr>
         <p:spPr>
           <a:xfrm>
-            <a:off x="3094873" y="3739030"/>
+            <a:off x="3094873" y="3953538"/>
             <a:ext cx="348172" cy="184666"/>
           </a:xfrm>
           <a:prstGeom prst="rect">
@@ -4228,7 +4293,7 @@
         </p:nvSpPr>
         <p:spPr>
           <a:xfrm>
-            <a:off x="4357295" y="3739384"/>
+            <a:off x="4357295" y="3953892"/>
             <a:ext cx="369012" cy="184666"/>
           </a:xfrm>
           <a:prstGeom prst="rect">
@@ -4252,36 +4317,6 @@
           </a:p>
         </p:txBody>
       </p:sp>
-      <p:pic>
-        <p:nvPicPr>
-          <p:cNvPr id="92" name="Picture 91">
-            <a:extLst>
-              <a:ext uri="{FF2B5EF4-FFF2-40B4-BE49-F238E27FC236}">
-                <a16:creationId xmlns:a16="http://schemas.microsoft.com/office/drawing/2014/main" id="{EE95A395-3386-3B86-974D-CB0C6F361EDD}"/>
-              </a:ext>
-            </a:extLst>
-          </p:cNvPr>
-          <p:cNvPicPr>
-            <a:picLocks noChangeAspect="1"/>
-          </p:cNvPicPr>
-          <p:nvPr/>
-        </p:nvPicPr>
-        <p:blipFill>
-          <a:blip r:embed="rId16"/>
-          <a:stretch>
-            <a:fillRect/>
-          </a:stretch>
-        </p:blipFill>
-        <p:spPr>
-          <a:xfrm>
-            <a:off x="4753995" y="1329645"/>
-            <a:ext cx="1181100" cy="1460500"/>
-          </a:xfrm>
-          <a:prstGeom prst="rect">
-            <a:avLst/>
-          </a:prstGeom>
-        </p:spPr>
-      </p:pic>
       <p:sp>
         <p:nvSpPr>
           <p:cNvPr id="80" name="TextBox 79">
@@ -4296,7 +4331,7 @@
         </p:nvSpPr>
         <p:spPr>
           <a:xfrm rot="16200000">
-            <a:off x="-442061" y="3328836"/>
+            <a:off x="-442061" y="3543344"/>
             <a:ext cx="1056700" cy="215444"/>
           </a:xfrm>
           <a:prstGeom prst="rect">
@@ -4320,36 +4355,6 @@
           </a:p>
         </p:txBody>
       </p:sp>
-      <p:pic>
-        <p:nvPicPr>
-          <p:cNvPr id="82" name="Picture 81">
-            <a:extLst>
-              <a:ext uri="{FF2B5EF4-FFF2-40B4-BE49-F238E27FC236}">
-                <a16:creationId xmlns:a16="http://schemas.microsoft.com/office/drawing/2014/main" id="{5018A438-D4CF-5528-E811-804E117E7D9E}"/>
-              </a:ext>
-            </a:extLst>
-          </p:cNvPr>
-          <p:cNvPicPr>
-            <a:picLocks noChangeAspect="1"/>
-          </p:cNvPicPr>
-          <p:nvPr/>
-        </p:nvPicPr>
-        <p:blipFill>
-          <a:blip r:embed="rId17"/>
-          <a:stretch>
-            <a:fillRect/>
-          </a:stretch>
-        </p:blipFill>
-        <p:spPr>
-          <a:xfrm>
-            <a:off x="4753995" y="2661858"/>
-            <a:ext cx="1181100" cy="1549400"/>
-          </a:xfrm>
-          <a:prstGeom prst="rect">
-            <a:avLst/>
-          </a:prstGeom>
-        </p:spPr>
-      </p:pic>
       <p:sp>
         <p:nvSpPr>
           <p:cNvPr id="83" name="TextBox 82">
@@ -4364,7 +4369,7 @@
         </p:nvSpPr>
         <p:spPr>
           <a:xfrm>
-            <a:off x="5160039" y="3533946"/>
+            <a:off x="5160039" y="3748454"/>
             <a:ext cx="369012" cy="184666"/>
           </a:xfrm>
           <a:prstGeom prst="rect">
@@ -4402,7 +4407,7 @@
         </p:nvSpPr>
         <p:spPr>
           <a:xfrm>
-            <a:off x="5476745" y="2697812"/>
+            <a:off x="5476745" y="2912320"/>
             <a:ext cx="369012" cy="184666"/>
           </a:xfrm>
           <a:prstGeom prst="rect">
@@ -4440,7 +4445,7 @@
         </p:nvSpPr>
         <p:spPr>
           <a:xfrm>
-            <a:off x="5518246" y="2272601"/>
+            <a:off x="5518246" y="2487109"/>
             <a:ext cx="325730" cy="184666"/>
           </a:xfrm>
           <a:prstGeom prst="rect">
@@ -4478,7 +4483,7 @@
         </p:nvSpPr>
         <p:spPr>
           <a:xfrm>
-            <a:off x="5209103" y="1486502"/>
+            <a:off x="5209103" y="1701010"/>
             <a:ext cx="325730" cy="184666"/>
           </a:xfrm>
           <a:prstGeom prst="rect">
@@ -4516,7 +4521,7 @@
         </p:nvSpPr>
         <p:spPr>
           <a:xfrm>
-            <a:off x="5514763" y="1015539"/>
+            <a:off x="5514763" y="1230047"/>
             <a:ext cx="369012" cy="184666"/>
           </a:xfrm>
           <a:prstGeom prst="rect">
@@ -4554,7 +4559,7 @@
         </p:nvSpPr>
         <p:spPr>
           <a:xfrm>
-            <a:off x="5187462" y="2495"/>
+            <a:off x="5187462" y="217003"/>
             <a:ext cx="369012" cy="184666"/>
           </a:xfrm>
           <a:prstGeom prst="rect">
@@ -4592,7 +4597,7 @@
         </p:nvSpPr>
         <p:spPr>
           <a:xfrm rot="16200000">
-            <a:off x="-444464" y="1931534"/>
+            <a:off x="-444464" y="2146042"/>
             <a:ext cx="1061509" cy="215444"/>
           </a:xfrm>
           <a:prstGeom prst="rect">
@@ -4630,7 +4635,7 @@
         </p:nvSpPr>
         <p:spPr>
           <a:xfrm rot="16200000">
-            <a:off x="-420419" y="534233"/>
+            <a:off x="-420419" y="748741"/>
             <a:ext cx="1013419" cy="215444"/>
           </a:xfrm>
           <a:prstGeom prst="rect">
@@ -4668,7 +4673,7 @@
         </p:nvSpPr>
         <p:spPr>
           <a:xfrm>
-            <a:off x="8505" y="-2567"/>
+            <a:off x="8506" y="211942"/>
             <a:ext cx="150041" cy="123111"/>
           </a:xfrm>
           <a:prstGeom prst="rect">
@@ -4706,7 +4711,7 @@
         </p:nvSpPr>
         <p:spPr>
           <a:xfrm>
-            <a:off x="1195388" y="-2567"/>
+            <a:off x="1195389" y="211942"/>
             <a:ext cx="154851" cy="123111"/>
           </a:xfrm>
           <a:prstGeom prst="rect">
@@ -4744,7 +4749,7 @@
         </p:nvSpPr>
         <p:spPr>
           <a:xfrm>
-            <a:off x="2374343" y="-2567"/>
+            <a:off x="2374344" y="211942"/>
             <a:ext cx="150041" cy="123111"/>
           </a:xfrm>
           <a:prstGeom prst="rect">
@@ -4782,7 +4787,7 @@
         </p:nvSpPr>
         <p:spPr>
           <a:xfrm>
-            <a:off x="3547352" y="-2567"/>
+            <a:off x="3547353" y="211942"/>
             <a:ext cx="154851" cy="123111"/>
           </a:xfrm>
           <a:prstGeom prst="rect">
@@ -4820,7 +4825,7 @@
         </p:nvSpPr>
         <p:spPr>
           <a:xfrm>
-            <a:off x="4753995" y="-2567"/>
+            <a:off x="4753996" y="211942"/>
             <a:ext cx="150041" cy="123111"/>
           </a:xfrm>
           <a:prstGeom prst="rect">
@@ -4858,7 +4863,7 @@
         </p:nvSpPr>
         <p:spPr>
           <a:xfrm>
-            <a:off x="8505" y="1329645"/>
+            <a:off x="8506" y="1544154"/>
             <a:ext cx="125997" cy="123111"/>
           </a:xfrm>
           <a:prstGeom prst="rect">
@@ -4896,7 +4901,7 @@
         </p:nvSpPr>
         <p:spPr>
           <a:xfrm>
-            <a:off x="1195388" y="1329645"/>
+            <a:off x="1195389" y="1544154"/>
             <a:ext cx="154851" cy="123111"/>
           </a:xfrm>
           <a:prstGeom prst="rect">
@@ -4934,7 +4939,7 @@
         </p:nvSpPr>
         <p:spPr>
           <a:xfrm>
-            <a:off x="2374343" y="1329645"/>
+            <a:off x="2374344" y="1544154"/>
             <a:ext cx="125997" cy="123111"/>
           </a:xfrm>
           <a:prstGeom prst="rect">
@@ -4972,7 +4977,7 @@
         </p:nvSpPr>
         <p:spPr>
           <a:xfrm>
-            <a:off x="3547352" y="1329645"/>
+            <a:off x="3547353" y="1544154"/>
             <a:ext cx="125997" cy="123111"/>
           </a:xfrm>
           <a:prstGeom prst="rect">
@@ -5010,7 +5015,7 @@
         </p:nvSpPr>
         <p:spPr>
           <a:xfrm>
-            <a:off x="4753995" y="1329645"/>
+            <a:off x="4753996" y="1544154"/>
             <a:ext cx="125997" cy="123111"/>
           </a:xfrm>
           <a:prstGeom prst="rect">
@@ -5048,7 +5053,7 @@
         </p:nvSpPr>
         <p:spPr>
           <a:xfrm>
-            <a:off x="8505" y="2661858"/>
+            <a:off x="8506" y="2876367"/>
             <a:ext cx="150041" cy="123111"/>
           </a:xfrm>
           <a:prstGeom prst="rect">
@@ -5086,7 +5091,7 @@
         </p:nvSpPr>
         <p:spPr>
           <a:xfrm>
-            <a:off x="1195388" y="2661858"/>
+            <a:off x="1195389" y="2876367"/>
             <a:ext cx="121187" cy="123111"/>
           </a:xfrm>
           <a:prstGeom prst="rect">
@@ -5124,7 +5129,7 @@
         </p:nvSpPr>
         <p:spPr>
           <a:xfrm>
-            <a:off x="2374343" y="2661858"/>
+            <a:off x="2374344" y="2876367"/>
             <a:ext cx="125997" cy="123111"/>
           </a:xfrm>
           <a:prstGeom prst="rect">
@@ -5162,7 +5167,7 @@
         </p:nvSpPr>
         <p:spPr>
           <a:xfrm>
-            <a:off x="3547352" y="2661858"/>
+            <a:off x="3547353" y="2876367"/>
             <a:ext cx="125997" cy="123111"/>
           </a:xfrm>
           <a:prstGeom prst="rect">
@@ -5200,7 +5205,7 @@
         </p:nvSpPr>
         <p:spPr>
           <a:xfrm>
-            <a:off x="4753995" y="2661858"/>
+            <a:off x="4753996" y="2876367"/>
             <a:ext cx="125997" cy="123111"/>
           </a:xfrm>
           <a:prstGeom prst="rect">
@@ -5238,7 +5243,7 @@
         </p:nvSpPr>
         <p:spPr>
           <a:xfrm>
-            <a:off x="5055679" y="4054360"/>
+            <a:off x="5055680" y="4268869"/>
             <a:ext cx="887921" cy="92333"/>
           </a:xfrm>
           <a:prstGeom prst="rect">
@@ -5261,6 +5266,44 @@
                 <a:cs typeface="Arial" panose="020B0604020202020204" pitchFamily="34" charset="0"/>
               </a:rPr>
               <a:t>Disease Coinfection</a:t>
+            </a:r>
+          </a:p>
+        </p:txBody>
+      </p:sp>
+      <p:sp>
+        <p:nvSpPr>
+          <p:cNvPr id="2" name="TextBox 1">
+            <a:extLst>
+              <a:ext uri="{FF2B5EF4-FFF2-40B4-BE49-F238E27FC236}">
+                <a16:creationId xmlns:a16="http://schemas.microsoft.com/office/drawing/2014/main" id="{EBB036A7-F611-56C4-556F-6F8765EF3DD7}"/>
+              </a:ext>
+            </a:extLst>
+          </p:cNvPr>
+          <p:cNvSpPr txBox="1"/>
+          <p:nvPr/>
+        </p:nvSpPr>
+        <p:spPr>
+          <a:xfrm>
+            <a:off x="-21433" y="-27924"/>
+            <a:ext cx="652743" cy="246221"/>
+          </a:xfrm>
+          <a:prstGeom prst="rect">
+            <a:avLst/>
+          </a:prstGeom>
+          <a:noFill/>
+        </p:spPr>
+        <p:txBody>
+          <a:bodyPr wrap="none" rtlCol="0">
+            <a:spAutoFit/>
+          </a:bodyPr>
+          <a:lstStyle/>
+          <a:p>
+            <a:r>
+              <a:rPr lang="en-US" sz="1000" dirty="0">
+                <a:latin typeface="Arial" panose="020B0604020202020204" pitchFamily="34" charset="0"/>
+                <a:cs typeface="Arial" panose="020B0604020202020204" pitchFamily="34" charset="0"/>
+              </a:rPr>
+              <a:t>Figure 2</a:t>
             </a:r>
           </a:p>
         </p:txBody>
